--- a/实验02-开源在线商城系统二次开发-课堂展示.pptx
+++ b/实验02-开源在线商城系统二次开发-课堂展示.pptx
@@ -14958,7 +14958,7 @@
                 <a:cs typeface="Noto Sans SC"/>
                 <a:sym typeface="Noto Sans SC"/>
               </a:rPr>
-              <a:t>姓名：邱鑫宇　学号：＿＿＿＿＿＿　班级：软件2301</a:t>
+              <a:t>姓名：邱鑫宇　学号：23110506003　班级：软件2301</a:t>
             </a:r>
             <a:endParaRPr lang="en-US" sz="1100"/>
           </a:p>
@@ -14978,7 +14978,7 @@
                 <a:cs typeface="Noto Sans SC"/>
                 <a:sym typeface="Noto Sans SC"/>
               </a:rPr>
-              <a:t>日期：2026 年 ＿ 月 ＿ 日　·　基线 Commit：19e8a6fbefea5a385e9502409908bfbebbecf526</a:t>
+              <a:t>日期：2026 年 10 月 26 日　·　基线 Commit：19e8a6fbefea5a385e9502409908bfbebbecf526</a:t>
             </a:r>
           </a:p>
         </p:txBody>
